--- a/courses/build/teach-the-teachers/T-D3.zu.pptx
+++ b/courses/build/teach-the-teachers/T-D3.zu.pptx
@@ -4983,7 +4983,7 @@
                 </a:solidFill>
                 <a:latin typeface="Segoe Print"/>
               </a:rPr>
-              <a:t>Day 3</a:t>
+              <a:t>Usuku 3</a:t>
             </a:r>
           </a:p>
         </p:txBody>
@@ -5066,7 +5066,7 @@
                 </a:solidFill>
                 <a:latin typeface="Trebuchet MS"/>
               </a:rPr>
-              <a:t>Hands on, every time</a:t>
+              <a:t>Izandla emsebenzini, njalo</a:t>
             </a:r>
           </a:p>
           <a:p>
@@ -5082,7 +5082,7 @@
                 </a:solidFill>
                 <a:latin typeface="Trebuchet MS"/>
               </a:rPr>
-              <a:t>Day 3 of 5</a:t>
+              <a:t>Usuku 3 kwezi-5</a:t>
             </a:r>
           </a:p>
         </p:txBody>
@@ -5388,7 +5388,7 @@
                 </a:solidFill>
                 <a:latin typeface="Segoe Print"/>
               </a:rPr>
-              <a:t>Step out: unpack</a:t>
+              <a:t>Phumani: sihlaziye</a:t>
             </a:r>
           </a:p>
         </p:txBody>
@@ -5465,13 +5465,13 @@
               </a:spcAft>
             </a:pPr>
             <a:r>
-              <a:rPr sz="2800" b="0">
+              <a:rPr sz="2400" b="0">
                 <a:solidFill>
                   <a:srgbClr val="1C1C1C"/>
                 </a:solidFill>
                 <a:latin typeface="Trebuchet MS"/>
               </a:rPr>
-              <a:t>•  Who had fewer than 4 ticks?</a:t>
+              <a:t>•  Ubani othole ama-tick angaphansi kuka-4?</a:t>
             </a:r>
           </a:p>
           <a:p>
@@ -5481,13 +5481,13 @@
               </a:spcAft>
             </a:pPr>
             <a:r>
-              <a:rPr sz="2800" b="0">
+              <a:rPr sz="2400" b="0">
                 <a:solidFill>
                   <a:srgbClr val="1C1C1C"/>
                 </a:solidFill>
                 <a:latin typeface="Trebuchet MS"/>
               </a:rPr>
-              <a:t>•  What kept every hand busy?</a:t>
+              <a:t>•  Yini egcine zonke izandla zimatasa?</a:t>
             </a:r>
           </a:p>
         </p:txBody>
@@ -5793,7 +5793,7 @@
                 </a:solidFill>
                 <a:latin typeface="Segoe Print"/>
               </a:rPr>
-              <a:t>Mode 2: slides</a:t>
+              <a:t>Indlela 2: ama-slide</a:t>
             </a:r>
           </a:p>
         </p:txBody>
@@ -5876,7 +5876,7 @@
                 </a:solidFill>
                 <a:latin typeface="Trebuchet MS"/>
               </a:rPr>
-              <a:t>Can you read it from the back?</a:t>
+              <a:t>Ungakufunda usemuva?</a:t>
             </a:r>
           </a:p>
         </p:txBody>
@@ -6182,7 +6182,7 @@
                 </a:solidFill>
                 <a:latin typeface="Segoe Print"/>
               </a:rPr>
-              <a:t>When slides help</a:t>
+              <a:t>Lapho ama-slide esiza khona</a:t>
             </a:r>
           </a:p>
         </p:txBody>
@@ -6259,13 +6259,13 @@
               </a:spcAft>
             </a:pPr>
             <a:r>
-              <a:rPr sz="2800" b="0">
+              <a:rPr sz="2400" b="0">
                 <a:solidFill>
                   <a:srgbClr val="1C1C1C"/>
                 </a:solidFill>
                 <a:latin typeface="Trebuchet MS"/>
               </a:rPr>
-              <a:t>•  Things that move or grow</a:t>
+              <a:t>•  Izinto ezihambayo noma ezikhulayo</a:t>
             </a:r>
           </a:p>
           <a:p>
@@ -6275,13 +6275,13 @@
               </a:spcAft>
             </a:pPr>
             <a:r>
-              <a:rPr sz="2800" b="0">
+              <a:rPr sz="2400" b="0">
                 <a:solidFill>
                   <a:srgbClr val="1C1C1C"/>
                 </a:solidFill>
                 <a:latin typeface="Trebuchet MS"/>
               </a:rPr>
-              <a:t>•  Pests out of season</a:t>
+              <a:t>•  Izinambuzane ezingekho ngalesi sikhathi</a:t>
             </a:r>
           </a:p>
           <a:p>
@@ -6291,13 +6291,13 @@
               </a:spcAft>
             </a:pPr>
             <a:r>
-              <a:rPr sz="2800" b="0">
+              <a:rPr sz="2400" b="0">
                 <a:solidFill>
                   <a:srgbClr val="1C1C1C"/>
                 </a:solidFill>
                 <a:latin typeface="Trebuchet MS"/>
               </a:rPr>
-              <a:t>•  Big group in a dark room</a:t>
+              <a:t>•  Iqembu elikhulu egumbini elimnyama</a:t>
             </a:r>
           </a:p>
         </p:txBody>
@@ -6547,7 +6547,7 @@
                 </a:solidFill>
                 <a:latin typeface="Segoe Print"/>
               </a:rPr>
-              <a:t>Set up to be seen</a:t>
+              <a:t>Hlela ukuze kubonakale</a:t>
             </a:r>
           </a:p>
         </p:txBody>
@@ -6630,7 +6630,7 @@
                 </a:solidFill>
                 <a:latin typeface="Trebuchet MS"/>
               </a:rPr>
-              <a:t>•  Test from the back, in daylight</a:t>
+              <a:t>•  Hlola usemuva, emini</a:t>
             </a:r>
           </a:p>
           <a:p>
@@ -6646,7 +6646,7 @@
                 </a:solidFill>
                 <a:latin typeface="Trebuchet MS"/>
               </a:rPr>
-              <a:t>•  TV beats projector; press B</a:t>
+              <a:t>•  I-TV ingcono kune-projector; cindezela B</a:t>
             </a:r>
           </a:p>
           <a:p>
@@ -6662,7 +6662,7 @@
                 </a:solidFill>
                 <a:latin typeface="Trebuchet MS"/>
               </a:rPr>
-              <a:t>•  Tablet per group of 5</a:t>
+              <a:t>•  Ithebhulethi eqenjini ngalinye labantu 5</a:t>
             </a:r>
           </a:p>
         </p:txBody>
@@ -7051,7 +7051,7 @@
                 </a:solidFill>
                 <a:latin typeface="Segoe Print"/>
               </a:rPr>
-              <a:t>Three stations</a:t>
+              <a:t>Iziteshi ezintathu</a:t>
             </a:r>
           </a:p>
         </p:txBody>
@@ -7128,13 +7128,13 @@
               </a:spcAft>
             </a:pPr>
             <a:r>
-              <a:rPr sz="3000" b="1">
+              <a:rPr sz="2600" b="1">
                 <a:solidFill>
                   <a:srgbClr val="1C1C1C"/>
                 </a:solidFill>
                 <a:latin typeface="Trebuchet MS"/>
               </a:rPr>
-              <a:t>•  A: big screen, 2 slides</a:t>
+              <a:t>•  A: isikrini esikhulu, ama-slide 2</a:t>
             </a:r>
           </a:p>
           <a:p>
@@ -7144,13 +7144,13 @@
               </a:spcAft>
             </a:pPr>
             <a:r>
-              <a:rPr sz="3000" b="1">
+              <a:rPr sz="2600" b="1">
                 <a:solidFill>
                   <a:srgbClr val="1C1C1C"/>
                 </a:solidFill>
                 <a:latin typeface="Trebuchet MS"/>
               </a:rPr>
-              <a:t>•  B: tablet clip, teach it</a:t>
+              <a:t>•  B: ividiyo kuthebhulethi, yifundiseni</a:t>
             </a:r>
           </a:p>
           <a:p>
@@ -7160,13 +7160,13 @@
               </a:spcAft>
             </a:pPr>
             <a:r>
-              <a:rPr sz="3000" b="1">
+              <a:rPr sz="2600" b="1">
                 <a:solidFill>
                   <a:srgbClr val="1C1C1C"/>
                 </a:solidFill>
                 <a:latin typeface="Trebuchet MS"/>
               </a:rPr>
-              <a:t>•  C: paper flip-book</a:t>
+              <a:t>•  C: incwajana yezithombe yephepha</a:t>
             </a:r>
           </a:p>
         </p:txBody>
@@ -7472,7 +7472,7 @@
                 </a:solidFill>
                 <a:latin typeface="Segoe Print"/>
               </a:rPr>
-              <a:t>Hand over, don't take over</a:t>
+              <a:t>Dlulisela, ungathathi izintambo</a:t>
             </a:r>
           </a:p>
         </p:txBody>
@@ -7549,13 +7549,13 @@
               </a:spcAft>
             </a:pPr>
             <a:r>
-              <a:rPr sz="2800" b="0">
+              <a:rPr sz="2400" b="0">
                 <a:solidFill>
                   <a:srgbClr val="1C1C1C"/>
                 </a:solidFill>
                 <a:latin typeface="Trebuchet MS"/>
               </a:rPr>
-              <a:t>•  Plan who leads each step</a:t>
+              <a:t>•  Hlelani ozohola isinyathelo ngasinye</a:t>
             </a:r>
           </a:p>
           <a:p>
@@ -7565,13 +7565,13 @@
               </a:spcAft>
             </a:pPr>
             <a:r>
-              <a:rPr sz="2800" b="0">
+              <a:rPr sz="2400" b="0">
                 <a:solidFill>
                   <a:srgbClr val="1C1C1C"/>
                 </a:solidFill>
                 <a:latin typeface="Trebuchet MS"/>
               </a:rPr>
-              <a:t>•  Say the handover out loud</a:t>
+              <a:t>•  Dlulisela ngezwi elizwakalayo</a:t>
             </a:r>
           </a:p>
           <a:p>
@@ -7581,13 +7581,13 @@
               </a:spcAft>
             </a:pPr>
             <a:r>
-              <a:rPr sz="2800" b="0">
+              <a:rPr sz="2400" b="0">
                 <a:solidFill>
                   <a:srgbClr val="1C1C1C"/>
                 </a:solidFill>
                 <a:latin typeface="Trebuchet MS"/>
               </a:rPr>
-              <a:t>•  Touch your ear to offer</a:t>
+              <a:t>•  Thinta indlebe yakho ukuze unikele</a:t>
             </a:r>
           </a:p>
         </p:txBody>
@@ -7976,7 +7976,7 @@
                 </a:solidFill>
                 <a:latin typeface="Segoe Print"/>
               </a:rPr>
-              <a:t>Micro-teaching Round 3</a:t>
+              <a:t>Ukufundisa okuncane: Round 3</a:t>
             </a:r>
           </a:p>
         </p:txBody>
@@ -8053,13 +8053,13 @@
               </a:spcAft>
             </a:pPr>
             <a:r>
-              <a:rPr sz="3000" b="1">
+              <a:rPr sz="2600" b="1">
                 <a:solidFill>
                   <a:srgbClr val="1C1C1C"/>
                 </a:solidFill>
                 <a:latin typeface="Trebuchet MS"/>
               </a:rPr>
-              <a:t>•  15 minutes, pairs, half-class</a:t>
+              <a:t>•  Imizuzu 15, ngababili, ingxenye yekilasi</a:t>
             </a:r>
           </a:p>
           <a:p>
@@ -8069,13 +8069,13 @@
               </a:spcAft>
             </a:pPr>
             <a:r>
-              <a:rPr sz="3000" b="1">
+              <a:rPr sz="2600" b="1">
                 <a:solidFill>
                   <a:srgbClr val="1C1C1C"/>
                 </a:solidFill>
                 <a:latin typeface="Trebuchet MS"/>
               </a:rPr>
-              <a:t>•  A practical in two groups of 4</a:t>
+              <a:t>•  Umsebenzi wezandla ngamaqembu amabili aba-4</a:t>
             </a:r>
           </a:p>
           <a:p>
@@ -8085,13 +8085,13 @@
               </a:spcAft>
             </a:pPr>
             <a:r>
-              <a:rPr sz="3000" b="1">
+              <a:rPr sz="2600" b="1">
                 <a:solidFill>
                   <a:srgbClr val="1C1C1C"/>
                 </a:solidFill>
                 <a:latin typeface="Trebuchet MS"/>
               </a:rPr>
-              <a:t>•  7 minutes feedback</a:t>
+              <a:t>•  Imizuzu 7 yempendulo</a:t>
             </a:r>
           </a:p>
         </p:txBody>
@@ -8397,7 +8397,7 @@
                 </a:solidFill>
                 <a:latin typeface="Segoe Print"/>
               </a:rPr>
-              <a:t>Feedback for pairs</a:t>
+              <a:t>Impendulo yababili</a:t>
             </a:r>
           </a:p>
         </p:txBody>
@@ -8480,7 +8480,7 @@
                 </a:solidFill>
                 <a:latin typeface="Trebuchet MS"/>
               </a:rPr>
-              <a:t>•  Partners star each other</a:t>
+              <a:t>•  Abangane banikana izinkanyezi</a:t>
             </a:r>
           </a:p>
           <a:p>
@@ -8496,7 +8496,7 @@
                 </a:solidFill>
                 <a:latin typeface="Trebuchet MS"/>
               </a:rPr>
-              <a:t>•  Observer 1: talk and questions</a:t>
+              <a:t>•  Umbukeli 1: ukukhuluma nemibuzo</a:t>
             </a:r>
           </a:p>
           <a:p>
@@ -8512,7 +8512,7 @@
                 </a:solidFill>
                 <a:latin typeface="Trebuchet MS"/>
               </a:rPr>
-              <a:t>•  Observer 2: hands and handovers</a:t>
+              <a:t>•  Umbukeli 2: izandla nokudlulisela</a:t>
             </a:r>
           </a:p>
         </p:txBody>
@@ -8818,7 +8818,7 @@
                 </a:solidFill>
                 <a:latin typeface="Segoe Print"/>
               </a:rPr>
-              <a:t>Course craft: the kit</a:t>
+              <a:t>Ubuciko besifundo: i-kit</a:t>
             </a:r>
           </a:p>
         </p:txBody>
@@ -8901,7 +8901,7 @@
                 </a:solidFill>
                 <a:latin typeface="Trebuchet MS"/>
               </a:rPr>
-              <a:t>•  Count per group, plus one spare</a:t>
+              <a:t>•  Bala ngeqembu, kanye nesisodwa esengeziwe</a:t>
             </a:r>
           </a:p>
           <a:p>
@@ -8917,7 +8917,7 @@
                 </a:solidFill>
                 <a:latin typeface="Trebuchet MS"/>
               </a:rPr>
-              <a:t>•  Kit in, kit out, every day</a:t>
+              <a:t>•  I-kit ingena, i-kit iphuma, nsuku zonke</a:t>
             </a:r>
           </a:p>
           <a:p>
@@ -8933,7 +8933,7 @@
                 </a:solidFill>
                 <a:latin typeface="Trebuchet MS"/>
               </a:rPr>
-              <a:t>•  Certificates: registered + 10%</a:t>
+              <a:t>•  Izitifiketi: ababhalisile + 10%</a:t>
             </a:r>
           </a:p>
         </p:txBody>
@@ -9239,7 +9239,7 @@
                 </a:solidFill>
                 <a:latin typeface="Segoe Print"/>
               </a:rPr>
-              <a:t>The 2022 story</a:t>
+              <a:t>Indaba ka-2022</a:t>
             </a:r>
           </a:p>
         </p:txBody>
@@ -9316,13 +9316,13 @@
               </a:spcAft>
             </a:pPr>
             <a:r>
-              <a:rPr sz="2800" b="0">
+              <a:rPr sz="2400" b="0">
                 <a:solidFill>
                   <a:srgbClr val="1C1C1C"/>
                 </a:solidFill>
                 <a:latin typeface="Trebuchet MS"/>
               </a:rPr>
-              <a:t>•  One person digging</a:t>
+              <a:t>•  Umuntu oyedwa uyamba</a:t>
             </a:r>
           </a:p>
           <a:p>
@@ -9332,13 +9332,13 @@
               </a:spcAft>
             </a:pPr>
             <a:r>
-              <a:rPr sz="2800" b="0">
+              <a:rPr sz="2400" b="0">
                 <a:solidFill>
                   <a:srgbClr val="1C1C1C"/>
                 </a:solidFill>
                 <a:latin typeface="Trebuchet MS"/>
               </a:rPr>
-              <a:t>•  Twenty-five watching</a:t>
+              <a:t>•  Abangu-25 bayabuka</a:t>
             </a:r>
           </a:p>
           <a:p>
@@ -9348,13 +9348,13 @@
               </a:spcAft>
             </a:pPr>
             <a:r>
-              <a:rPr sz="2800" b="0">
+              <a:rPr sz="2400" b="0">
                 <a:solidFill>
                   <a:srgbClr val="1C1C1C"/>
                 </a:solidFill>
                 <a:latin typeface="Trebuchet MS"/>
               </a:rPr>
-              <a:t>•  Kit for four groups in the car</a:t>
+              <a:t>•  I-kit yamaqembu amane isemotweni</a:t>
             </a:r>
           </a:p>
         </p:txBody>
@@ -9660,7 +9660,7 @@
                 </a:solidFill>
                 <a:latin typeface="Segoe Print"/>
               </a:rPr>
-              <a:t>Hands on, not a demo</a:t>
+              <a:t>Izandla emsebenzini, hhayi i-demo</a:t>
             </a:r>
           </a:p>
         </p:txBody>
@@ -9737,13 +9737,13 @@
               </a:spcAft>
             </a:pPr>
             <a:r>
-              <a:rPr sz="2800" b="0">
+              <a:rPr sz="2400" b="0">
                 <a:solidFill>
                   <a:srgbClr val="1C1C1C"/>
                 </a:solidFill>
                 <a:latin typeface="Trebuchet MS"/>
               </a:rPr>
-              <a:t>•  Kit per group · Demo 3 minutes</a:t>
+              <a:t>•  I-kit eqenjini ngalinye · I-demo imizuzu 3</a:t>
             </a:r>
           </a:p>
           <a:p>
@@ -9753,13 +9753,13 @@
               </a:spcAft>
             </a:pPr>
             <a:r>
-              <a:rPr sz="2800" b="0">
+              <a:rPr sz="2400" b="0">
                 <a:solidFill>
                   <a:srgbClr val="1C1C1C"/>
                 </a:solidFill>
                 <a:latin typeface="Trebuchet MS"/>
               </a:rPr>
-              <a:t>•  Groups of 5 · Stations apart</a:t>
+              <a:t>•  Amaqembu abantu 5 · Iziteshi zihlukene</a:t>
             </a:r>
           </a:p>
           <a:p>
@@ -9769,13 +9769,13 @@
               </a:spcAft>
             </a:pPr>
             <a:r>
-              <a:rPr sz="2800" b="0">
+              <a:rPr sz="2400" b="0">
                 <a:solidFill>
                   <a:srgbClr val="1C1C1C"/>
                 </a:solidFill>
                 <a:latin typeface="Trebuchet MS"/>
               </a:rPr>
-              <a:t>•  Hands behind your back</a:t>
+              <a:t>•  Izandla zakho ngemuva</a:t>
             </a:r>
           </a:p>
         </p:txBody>
@@ -10164,7 +10164,7 @@
                 </a:solidFill>
                 <a:latin typeface="Segoe Print"/>
               </a:rPr>
-              <a:t>Rescue the practical</a:t>
+              <a:t>Sindisani umsebenzi wezandla</a:t>
             </a:r>
           </a:p>
         </p:txBody>
@@ -10241,13 +10241,13 @@
               </a:spcAft>
             </a:pPr>
             <a:r>
-              <a:rPr sz="3000" b="1">
+              <a:rPr sz="2600" b="1">
                 <a:solidFill>
                   <a:srgbClr val="1C1C1C"/>
                 </a:solidFill>
                 <a:latin typeface="Trebuchet MS"/>
               </a:rPr>
-              <a:t>•  One card per group</a:t>
+              <a:t>•  Ikhadi elilodwa eqenjini ngalinye</a:t>
             </a:r>
           </a:p>
           <a:p>
@@ -10257,13 +10257,13 @@
               </a:spcAft>
             </a:pPr>
             <a:r>
-              <a:rPr sz="3000" b="1">
+              <a:rPr sz="2600" b="1">
                 <a:solidFill>
                   <a:srgbClr val="1C1C1C"/>
                 </a:solidFill>
                 <a:latin typeface="Trebuchet MS"/>
               </a:rPr>
-              <a:t>•  Plan the rescue, 12 minutes</a:t>
+              <a:t>•  Hlelani ukusindisa, imizuzu 12</a:t>
             </a:r>
           </a:p>
           <a:p>
@@ -10273,13 +10273,13 @@
               </a:spcAft>
             </a:pPr>
             <a:r>
-              <a:rPr sz="3000" b="1">
+              <a:rPr sz="2600" b="1">
                 <a:solidFill>
                   <a:srgbClr val="1C1C1C"/>
                 </a:solidFill>
                 <a:latin typeface="Trebuchet MS"/>
               </a:rPr>
-              <a:t>•  2 minutes to present</a:t>
+              <a:t>•  Imizuzu 2 yokwethula</a:t>
             </a:r>
           </a:p>
         </p:txBody>
@@ -10668,7 +10668,7 @@
                 </a:solidFill>
                 <a:latin typeface="Segoe Print"/>
               </a:rPr>
-              <a:t>One kit? Carousel</a:t>
+              <a:t>I-kit eyodwa? Jikelezani</a:t>
             </a:r>
           </a:p>
         </p:txBody>
@@ -10745,13 +10745,13 @@
               </a:spcAft>
             </a:pPr>
             <a:r>
-              <a:rPr sz="3000" b="1">
+              <a:rPr sz="2600" b="1">
                 <a:solidFill>
                   <a:srgbClr val="1C1C1C"/>
                 </a:solidFill>
                 <a:latin typeface="Trebuchet MS"/>
               </a:rPr>
-              <a:t>•  One A-frame, 25 learners</a:t>
+              <a:t>•  I-A-frame eyodwa, abafundi abangu-25</a:t>
             </a:r>
           </a:p>
           <a:p>
@@ -10761,13 +10761,13 @@
               </a:spcAft>
             </a:pPr>
             <a:r>
-              <a:rPr sz="3000" b="1">
+              <a:rPr sz="2600" b="1">
                 <a:solidFill>
                   <a:srgbClr val="1C1C1C"/>
                 </a:solidFill>
                 <a:latin typeface="Trebuchet MS"/>
               </a:rPr>
-              <a:t>•  Five stations, 8 minutes each</a:t>
+              <a:t>•  Iziteshi ezinhlanu, imizuzu 8 ngasinye</a:t>
             </a:r>
           </a:p>
           <a:p>
@@ -10777,13 +10777,13 @@
               </a:spcAft>
             </a:pPr>
             <a:r>
-              <a:rPr sz="3000" b="1">
+              <a:rPr sz="2600" b="1">
                 <a:solidFill>
                   <a:srgbClr val="1C1C1C"/>
                 </a:solidFill>
                 <a:latin typeface="Trebuchet MS"/>
               </a:rPr>
-              <a:t>•  Nobody watches over 10 minutes</a:t>
+              <a:t>•  Akekho obuka ngaphezu kwemizuzu 10</a:t>
             </a:r>
           </a:p>
         </p:txBody>
@@ -11116,7 +11116,7 @@
                 </a:solidFill>
                 <a:latin typeface="Segoe Print"/>
               </a:rPr>
-              <a:t>Spot the hazard</a:t>
+              <a:t>Thola ingozi</a:t>
             </a:r>
           </a:p>
         </p:txBody>
@@ -11193,13 +11193,13 @@
               </a:spcAft>
             </a:pPr>
             <a:r>
-              <a:rPr sz="3000" b="1">
+              <a:rPr sz="2600" b="1">
                 <a:solidFill>
                   <a:srgbClr val="1C1C1C"/>
                 </a:solidFill>
                 <a:latin typeface="Trebuchet MS"/>
               </a:rPr>
-              <a:t>•  Find 8 hazards in 4 minutes</a:t>
+              <a:t>•  Tholani izingozi ezi-8 ngemizuzu 4</a:t>
             </a:r>
           </a:p>
           <a:p>
@@ -11209,13 +11209,13 @@
               </a:spcAft>
             </a:pPr>
             <a:r>
-              <a:rPr sz="3000" b="1">
+              <a:rPr sz="2600" b="1">
                 <a:solidFill>
                   <a:srgbClr val="1C1C1C"/>
                 </a:solidFill>
                 <a:latin typeface="Trebuchet MS"/>
               </a:rPr>
-              <a:t>•  Tools points down</a:t>
+              <a:t>•  Amathuluzi akhombe phansi</a:t>
             </a:r>
           </a:p>
           <a:p>
@@ -11225,13 +11225,13 @@
               </a:spcAft>
             </a:pPr>
             <a:r>
-              <a:rPr sz="3000" b="1">
+              <a:rPr sz="2600" b="1">
                 <a:solidFill>
                   <a:srgbClr val="1C1C1C"/>
                 </a:solidFill>
                 <a:latin typeface="Trebuchet MS"/>
               </a:rPr>
-              <a:t>•  First aid kit open</a:t>
+              <a:t>•  Ikhithi yosizo lokuqala ivuliwe</a:t>
             </a:r>
           </a:p>
         </p:txBody>
@@ -11537,7 +11537,7 @@
                 </a:solidFill>
                 <a:latin typeface="Segoe Print"/>
               </a:rPr>
-              <a:t>Model practical: living soil</a:t>
+              <a:t>Umsebenzi wezandla oyisibonelo: inhlabathi ephilayo</a:t>
             </a:r>
           </a:p>
         </p:txBody>
@@ -11620,7 +11620,7 @@
                 </a:solidFill>
                 <a:latin typeface="Trebuchet MS"/>
               </a:rPr>
-              <a:t>You are farmers now</a:t>
+              <a:t>Manje ningabalimi</a:t>
             </a:r>
           </a:p>
           <a:p>
@@ -11636,7 +11636,7 @@
                 </a:solidFill>
                 <a:latin typeface="Trebuchet MS"/>
               </a:rPr>
-              <a:t>Recorders: practical-check card</a:t>
+              <a:t>Ababhali: ikhadi lokuhlola umsebenzi wezandla</a:t>
             </a:r>
           </a:p>
         </p:txBody>
@@ -11969,7 +11969,7 @@
                 </a:solidFill>
                 <a:latin typeface="Segoe Print"/>
               </a:rPr>
-              <a:t>Four soil tests</a:t>
+              <a:t>Izivivinyo ezine zenhlabathi</a:t>
             </a:r>
           </a:p>
         </p:txBody>
@@ -12052,7 +12052,7 @@
                 </a:solidFill>
                 <a:latin typeface="Trebuchet MS"/>
               </a:rPr>
-              <a:t>•  Squeeze · Jar · Worms · Infiltration</a:t>
+              <a:t>•  Cindezela · Imbiza · Imisundu · Ukungena kwamanzi</a:t>
             </a:r>
           </a:p>
           <a:p>
@@ -12068,7 +12068,7 @@
                 </a:solidFill>
                 <a:latin typeface="Trebuchet MS"/>
               </a:rPr>
-              <a:t>•  Every person does each</a:t>
+              <a:t>•  Wonke umuntu wenza ngasinye</a:t>
             </a:r>
           </a:p>
           <a:p>
@@ -12084,7 +12084,7 @@
                 </a:solidFill>
                 <a:latin typeface="Trebuchet MS"/>
               </a:rPr>
-              <a:t>•  27 minutes</a:t>
+              <a:t>•  Imizuzu 27</a:t>
             </a:r>
           </a:p>
         </p:txBody>
@@ -12417,7 +12417,7 @@
                 </a:solidFill>
                 <a:latin typeface="Segoe Print"/>
               </a:rPr>
-              <a:t>Test it side by side</a:t>
+              <a:t>Hlolani eceleni ngeceleni</a:t>
             </a:r>
           </a:p>
         </p:txBody>
@@ -12494,13 +12494,13 @@
               </a:spcAft>
             </a:pPr>
             <a:r>
-              <a:rPr sz="3000" b="1">
+              <a:rPr sz="2600" b="1">
                 <a:solidFill>
                   <a:srgbClr val="1C1C1C"/>
                 </a:solidFill>
                 <a:latin typeface="Trebuchet MS"/>
               </a:rPr>
-              <a:t>•  Two pots, one change</a:t>
+              <a:t>•  Amabhodwe amabili, ushintsho olulodwa</a:t>
             </a:r>
           </a:p>
           <a:p>
@@ -12510,13 +12510,13 @@
               </a:spcAft>
             </a:pPr>
             <a:r>
-              <a:rPr sz="3000" b="1">
+              <a:rPr sz="2600" b="1">
                 <a:solidFill>
                   <a:srgbClr val="1C1C1C"/>
                 </a:solidFill>
                 <a:latin typeface="Trebuchet MS"/>
               </a:rPr>
-              <a:t>•  Sow, label, water the same</a:t>
+              <a:t>•  Hlwanyelani, nibhale, ninisele ngokufanayo</a:t>
             </a:r>
           </a:p>
           <a:p>
@@ -12526,13 +12526,13 @@
               </a:spcAft>
             </a:pPr>
             <a:r>
-              <a:rPr sz="3000" b="1">
+              <a:rPr sz="2600" b="1">
                 <a:solidFill>
                   <a:srgbClr val="1C1C1C"/>
                 </a:solidFill>
                 <a:latin typeface="Trebuchet MS"/>
               </a:rPr>
-              <a:t>•  Predict, then look on Day 5</a:t>
+              <a:t>•  Qagelani, bese nibheka ngoSuku 5</a:t>
             </a:r>
           </a:p>
         </p:txBody>

--- a/courses/build/teach-the-teachers/T-D3.zu.pptx
+++ b/courses/build/teach-the-teachers/T-D3.zu.pptx
@@ -768,7 +768,7 @@
           </a:p>
           <a:p>
             <a:r>
-              <a:t>Clip T-ANI-18: public/course-animations/soil-health/watch-10-compost-heap.mp4</a:t>
+              <a:t>Clip T-ANI-18: public/course-animations/soil-health/flow-build-compost-heap.mp4</a:t>
             </a:r>
           </a:p>
         </p:txBody>
@@ -1700,7 +1700,7 @@
           </a:p>
           <a:p>
             <a:r>
-              <a:t>Clip T-ANI-17: public/course-animations/soil-health/watch-05-living-soil.mp4</a:t>
+              <a:t>Clip T-ANI-17: public/course-media/teach-the-teachers/T-ANI-17.mp4</a:t>
             </a:r>
           </a:p>
         </p:txBody>
@@ -1781,7 +1781,7 @@
           </a:p>
           <a:p>
             <a:r>
-              <a:t>Clip T-ANI-19: public/course-animations/soil-health/tour-soil-observation.mp4</a:t>
+              <a:t>Clip T-ANI-19: public/course-media/teach-the-teachers/T-ANI-19.mp4</a:t>
             </a:r>
           </a:p>
         </p:txBody>
@@ -6304,7 +6304,7 @@
       </p:sp>
       <p:pic>
         <p:nvPicPr>
-          <p:cNvPr id="7" name="Picture 6" descr="watch-10-compost-heap.jpg"/>
+          <p:cNvPr id="7" name="Picture 6" descr="flow-build-compost-heap.jpg"/>
           <p:cNvPicPr>
             <a:picLocks noChangeAspect="1"/>
           </p:cNvPicPr>
@@ -6404,7 +6404,7 @@
                 </a:solidFill>
                 <a:latin typeface="Trebuchet MS"/>
               </a:rPr>
-              <a:t>▶  Clip T-ANI-18 · play from the tablet: watch-10-compost-heap.mp4</a:t>
+              <a:t>▶  Clip T-ANI-18 · play from the tablet: flow-build-compost-heap.mp4</a:t>
             </a:r>
           </a:p>
         </p:txBody>
@@ -11641,49 +11641,27 @@
           </a:p>
         </p:txBody>
       </p:sp>
-      <p:pic>
-        <p:nvPicPr>
-          <p:cNvPr id="7" name="Picture 6" descr="watch-05-living-soil.jpg"/>
-          <p:cNvPicPr>
-            <a:picLocks noChangeAspect="1"/>
-          </p:cNvPicPr>
-          <p:nvPr/>
-        </p:nvPicPr>
-        <p:blipFill>
-          <a:blip r:embed="rId2"/>
-          <a:stretch>
-            <a:fillRect/>
-          </a:stretch>
-        </p:blipFill>
-        <p:spPr>
-          <a:xfrm>
-            <a:off x="7498079" y="2108835"/>
-            <a:ext cx="4206240" cy="2366010"/>
-          </a:xfrm>
-          <a:prstGeom prst="rect">
-            <a:avLst/>
-          </a:prstGeom>
-        </p:spPr>
-      </p:pic>
-      <p:sp>
-        <p:nvSpPr>
-          <p:cNvPr id="8" name="Rectangle 7"/>
+      <p:sp>
+        <p:nvSpPr>
+          <p:cNvPr id="7" name="Rectangle 6"/>
           <p:cNvSpPr/>
           <p:nvPr/>
         </p:nvSpPr>
         <p:spPr>
           <a:xfrm>
-            <a:off x="7498079" y="5257800"/>
-            <a:ext cx="4206240" cy="411480"/>
+            <a:off x="7498079" y="914400"/>
+            <a:ext cx="4206240" cy="4754880"/>
           </a:xfrm>
           <a:prstGeom prst="rect">
             <a:avLst/>
           </a:prstGeom>
           <a:solidFill>
-            <a:srgbClr val="1C1C1C"/>
+            <a:srgbClr val="C9A77C"/>
           </a:solidFill>
-          <a:ln>
-            <a:noFill/>
+          <a:ln w="15875">
+            <a:solidFill>
+              <a:srgbClr val="2C6FB7"/>
+            </a:solidFill>
           </a:ln>
           <a:effectLst/>
         </p:spPr>
@@ -11711,14 +11689,53 @@
       </p:sp>
       <p:sp>
         <p:nvSpPr>
+          <p:cNvPr id="8" name="TextBox 7"/>
+          <p:cNvSpPr txBox="1"/>
+          <p:nvPr/>
+        </p:nvSpPr>
+        <p:spPr>
+          <a:xfrm>
+            <a:off x="7726679" y="1097280"/>
+            <a:ext cx="3749040" cy="365760"/>
+          </a:xfrm>
+          <a:prstGeom prst="rect">
+            <a:avLst/>
+          </a:prstGeom>
+          <a:noFill/>
+        </p:spPr>
+        <p:txBody>
+          <a:bodyPr wrap="square" anchor="t" lIns="45720" rIns="45720">
+            <a:spAutoFit/>
+          </a:bodyPr>
+          <a:lstStyle/>
+          <a:p>
+            <a:pPr algn="l">
+              <a:spcAft>
+                <a:spcPts val="800"/>
+              </a:spcAft>
+            </a:pPr>
+            <a:r>
+              <a:rPr sz="1200" b="1">
+                <a:solidFill>
+                  <a:srgbClr val="D2452C"/>
+                </a:solidFill>
+                <a:latin typeface="Trebuchet MS"/>
+              </a:rPr>
+              <a:t>ANIMATION · T-ANI-17 · coming</a:t>
+            </a:r>
+          </a:p>
+        </p:txBody>
+      </p:sp>
+      <p:sp>
+        <p:nvSpPr>
           <p:cNvPr id="9" name="TextBox 8"/>
           <p:cNvSpPr txBox="1"/>
           <p:nvPr/>
         </p:nvSpPr>
         <p:spPr>
           <a:xfrm>
-            <a:off x="7589519" y="5266944"/>
-            <a:ext cx="4023360" cy="384048"/>
+            <a:off x="7726679" y="1481328"/>
+            <a:ext cx="3749040" cy="457200"/>
           </a:xfrm>
           <a:prstGeom prst="rect">
             <a:avLst/>
@@ -11726,7 +11743,7 @@
           <a:noFill/>
         </p:spPr>
         <p:txBody>
-          <a:bodyPr wrap="square" anchor="ctr" lIns="45720" rIns="45720">
+          <a:bodyPr wrap="square" anchor="t" lIns="45720" rIns="45720">
             <a:spAutoFit/>
           </a:bodyPr>
           <a:lstStyle/>
@@ -11737,13 +11754,52 @@
               </a:spcAft>
             </a:pPr>
             <a:r>
+              <a:rPr sz="1800" b="1">
+                <a:solidFill>
+                  <a:srgbClr val="1C1C1C"/>
+                </a:solidFill>
+                <a:latin typeface="Segoe Print"/>
+              </a:rPr>
+              <a:t>Living soil</a:t>
+            </a:r>
+          </a:p>
+        </p:txBody>
+      </p:sp>
+      <p:sp>
+        <p:nvSpPr>
+          <p:cNvPr id="10" name="TextBox 9"/>
+          <p:cNvSpPr txBox="1"/>
+          <p:nvPr/>
+        </p:nvSpPr>
+        <p:spPr>
+          <a:xfrm>
+            <a:off x="7726679" y="2011680"/>
+            <a:ext cx="3749040" cy="3474720"/>
+          </a:xfrm>
+          <a:prstGeom prst="rect">
+            <a:avLst/>
+          </a:prstGeom>
+          <a:noFill/>
+        </p:spPr>
+        <p:txBody>
+          <a:bodyPr wrap="square" anchor="t" lIns="45720" rIns="45720">
+            <a:spAutoFit/>
+          </a:bodyPr>
+          <a:lstStyle/>
+          <a:p>
+            <a:pPr algn="l">
+              <a:spcAft>
+                <a:spcPts val="800"/>
+              </a:spcAft>
+            </a:pPr>
+            <a:r>
               <a:rPr sz="1100" b="0">
                 <a:solidFill>
-                  <a:srgbClr val="C9A77C"/>
+                  <a:srgbClr val="1C1C1C"/>
                 </a:solidFill>
                 <a:latin typeface="Trebuchet MS"/>
               </a:rPr>
-              <a:t>▶  Clip T-ANI-17 · play from the tablet: watch-05-living-soil.mp4</a:t>
+              <a:t>Cut-away of dark garden soil under mulch, magnified: earthworms tunnel, fungus threads link roots, tiny specks of life move, crumbs hold air and water droplets; a fallen leaf above is slowly broken down and pulled into the soil. (Replaces the withdrawn clip `soil-health/watch-05-living-soil.mp4`.)</a:t>
             </a:r>
           </a:p>
         </p:txBody>
@@ -12089,49 +12145,27 @@
           </a:p>
         </p:txBody>
       </p:sp>
-      <p:pic>
-        <p:nvPicPr>
-          <p:cNvPr id="9" name="Picture 8" descr="tour-soil-observation.jpg"/>
-          <p:cNvPicPr>
-            <a:picLocks noChangeAspect="1"/>
-          </p:cNvPicPr>
-          <p:nvPr/>
-        </p:nvPicPr>
-        <p:blipFill>
-          <a:blip r:embed="rId2"/>
-          <a:stretch>
-            <a:fillRect/>
-          </a:stretch>
-        </p:blipFill>
-        <p:spPr>
-          <a:xfrm>
-            <a:off x="5852160" y="2148840"/>
-            <a:ext cx="5852160" cy="4023360"/>
-          </a:xfrm>
-          <a:prstGeom prst="rect">
-            <a:avLst/>
-          </a:prstGeom>
-        </p:spPr>
-      </p:pic>
-      <p:sp>
-        <p:nvSpPr>
-          <p:cNvPr id="10" name="Rectangle 9"/>
+      <p:sp>
+        <p:nvSpPr>
+          <p:cNvPr id="9" name="Rectangle 8"/>
           <p:cNvSpPr/>
           <p:nvPr/>
         </p:nvSpPr>
         <p:spPr>
           <a:xfrm>
-            <a:off x="5852160" y="5806440"/>
-            <a:ext cx="5852160" cy="411480"/>
+            <a:off x="5852160" y="2103120"/>
+            <a:ext cx="5852160" cy="4114800"/>
           </a:xfrm>
           <a:prstGeom prst="rect">
             <a:avLst/>
           </a:prstGeom>
           <a:solidFill>
-            <a:srgbClr val="1C1C1C"/>
+            <a:srgbClr val="C9A77C"/>
           </a:solidFill>
-          <a:ln>
-            <a:noFill/>
+          <a:ln w="15875">
+            <a:solidFill>
+              <a:srgbClr val="2C6FB7"/>
+            </a:solidFill>
           </a:ln>
           <a:effectLst/>
         </p:spPr>
@@ -12159,14 +12193,53 @@
       </p:sp>
       <p:sp>
         <p:nvSpPr>
+          <p:cNvPr id="10" name="TextBox 9"/>
+          <p:cNvSpPr txBox="1"/>
+          <p:nvPr/>
+        </p:nvSpPr>
+        <p:spPr>
+          <a:xfrm>
+            <a:off x="6080760" y="2286000"/>
+            <a:ext cx="5394960" cy="365760"/>
+          </a:xfrm>
+          <a:prstGeom prst="rect">
+            <a:avLst/>
+          </a:prstGeom>
+          <a:noFill/>
+        </p:spPr>
+        <p:txBody>
+          <a:bodyPr wrap="square" anchor="t" lIns="45720" rIns="45720">
+            <a:spAutoFit/>
+          </a:bodyPr>
+          <a:lstStyle/>
+          <a:p>
+            <a:pPr algn="l">
+              <a:spcAft>
+                <a:spcPts val="800"/>
+              </a:spcAft>
+            </a:pPr>
+            <a:r>
+              <a:rPr sz="1200" b="1">
+                <a:solidFill>
+                  <a:srgbClr val="D2452C"/>
+                </a:solidFill>
+                <a:latin typeface="Trebuchet MS"/>
+              </a:rPr>
+              <a:t>ANIMATION · T-ANI-19 · coming</a:t>
+            </a:r>
+          </a:p>
+        </p:txBody>
+      </p:sp>
+      <p:sp>
+        <p:nvSpPr>
           <p:cNvPr id="11" name="TextBox 10"/>
           <p:cNvSpPr txBox="1"/>
           <p:nvPr/>
         </p:nvSpPr>
         <p:spPr>
           <a:xfrm>
-            <a:off x="5943600" y="5815584"/>
-            <a:ext cx="5669280" cy="384048"/>
+            <a:off x="6080760" y="2670048"/>
+            <a:ext cx="5394960" cy="457200"/>
           </a:xfrm>
           <a:prstGeom prst="rect">
             <a:avLst/>
@@ -12174,7 +12247,7 @@
           <a:noFill/>
         </p:spPr>
         <p:txBody>
-          <a:bodyPr wrap="square" anchor="ctr" lIns="45720" rIns="45720">
+          <a:bodyPr wrap="square" anchor="t" lIns="45720" rIns="45720">
             <a:spAutoFit/>
           </a:bodyPr>
           <a:lstStyle/>
@@ -12185,13 +12258,52 @@
               </a:spcAft>
             </a:pPr>
             <a:r>
+              <a:rPr sz="1800" b="1">
+                <a:solidFill>
+                  <a:srgbClr val="1C1C1C"/>
+                </a:solidFill>
+                <a:latin typeface="Segoe Print"/>
+              </a:rPr>
+              <a:t>Soil observation</a:t>
+            </a:r>
+          </a:p>
+        </p:txBody>
+      </p:sp>
+      <p:sp>
+        <p:nvSpPr>
+          <p:cNvPr id="12" name="TextBox 11"/>
+          <p:cNvSpPr txBox="1"/>
+          <p:nvPr/>
+        </p:nvSpPr>
+        <p:spPr>
+          <a:xfrm>
+            <a:off x="6080760" y="3200400"/>
+            <a:ext cx="5394960" cy="2834640"/>
+          </a:xfrm>
+          <a:prstGeom prst="rect">
+            <a:avLst/>
+          </a:prstGeom>
+          <a:noFill/>
+        </p:spPr>
+        <p:txBody>
+          <a:bodyPr wrap="square" anchor="t" lIns="45720" rIns="45720">
+            <a:spAutoFit/>
+          </a:bodyPr>
+          <a:lstStyle/>
+          <a:p>
+            <a:pPr algn="l">
+              <a:spcAft>
+                <a:spcPts val="800"/>
+              </a:spcAft>
+            </a:pPr>
+            <a:r>
               <a:rPr sz="1100" b="0">
                 <a:solidFill>
-                  <a:srgbClr val="C9A77C"/>
+                  <a:srgbClr val="1C1C1C"/>
                 </a:solidFill>
                 <a:latin typeface="Trebuchet MS"/>
               </a:rPr>
-              <a:t>▶  Clip T-ANI-19 · play from the tablet: tour-soil-observation.mp4</a:t>
+              <a:t>Hands dig a spade-deep square of garden soil, lift it and crumble it: dark crumbs, fine roots, an earthworm, fungus threads. Beside it a pale hard lump from a path cracks apart with nothing living in it. Slow side-by-side comparison. (Replaces the withdrawn clip `soil-health/tour-soil-observation.mp4`.)</a:t>
             </a:r>
           </a:p>
         </p:txBody>
